--- a/lessons/Day5/B_Agents_LLMs_compressed.pptx
+++ b/lessons/Day5/B_Agents_LLMs_compressed.pptx
@@ -5,15 +5,20 @@
     <p:sldMasterId id="2147483648" r:id="rId1"/>
   </p:sldMasterIdLst>
   <p:notesMasterIdLst>
-    <p:notesMasterId r:id="rId8"/>
+    <p:notesMasterId r:id="rId13"/>
   </p:notesMasterIdLst>
   <p:sldIdLst>
     <p:sldId id="327" r:id="rId2"/>
     <p:sldId id="300" r:id="rId3"/>
     <p:sldId id="301" r:id="rId4"/>
-    <p:sldId id="328" r:id="rId5"/>
-    <p:sldId id="329" r:id="rId6"/>
-    <p:sldId id="330" r:id="rId7"/>
+    <p:sldId id="256" r:id="rId5"/>
+    <p:sldId id="257" r:id="rId6"/>
+    <p:sldId id="258" r:id="rId7"/>
+    <p:sldId id="259" r:id="rId8"/>
+    <p:sldId id="330" r:id="rId9"/>
+    <p:sldId id="328" r:id="rId10"/>
+    <p:sldId id="329" r:id="rId11"/>
+    <p:sldId id="333" r:id="rId12"/>
   </p:sldIdLst>
   <p:sldSz cx="9144000" cy="5143500" type="screen16x9"/>
   <p:notesSz cx="6858000" cy="9144000"/>
@@ -564,6 +569,106 @@
 </p:sldLayout>
 </file>
 
+<file path=ppt/slideLayouts/slideLayout2.xml><?xml version="1.0" encoding="utf-8"?>
+<p:sldLayout xmlns:a="http://schemas.openxmlformats.org/drawingml/2006/main" xmlns:r="http://schemas.openxmlformats.org/officeDocument/2006/relationships" xmlns:p="http://schemas.openxmlformats.org/presentationml/2006/main" type="blank">
+  <p:cSld name="Blank">
+    <p:spTree>
+      <p:nvGrpSpPr>
+        <p:cNvPr id="1" name=""/>
+        <p:cNvGrpSpPr/>
+        <p:nvPr/>
+      </p:nvGrpSpPr>
+      <p:grpSpPr>
+        <a:xfrm>
+          <a:off x="0" y="0"/>
+          <a:ext cx="0" cy="0"/>
+          <a:chOff x="0" y="0"/>
+          <a:chExt cx="0" cy="0"/>
+        </a:xfrm>
+      </p:grpSpPr>
+      <p:sp>
+        <p:nvSpPr>
+          <p:cNvPr id="2" name="Date Placeholder 1"/>
+          <p:cNvSpPr>
+            <a:spLocks noGrp="1"/>
+          </p:cNvSpPr>
+          <p:nvPr>
+            <p:ph type="dt" sz="half" idx="10"/>
+          </p:nvPr>
+        </p:nvSpPr>
+        <p:spPr/>
+        <p:txBody>
+          <a:bodyPr/>
+          <a:lstStyle/>
+          <a:p>
+            <a:fld id="{5BCAD085-E8A6-8845-BD4E-CB4CCA059FC4}" type="datetimeFigureOut">
+              <a:rPr lang="en-US" smtClean="0"/>
+              <a:t>6/11/26</a:t>
+            </a:fld>
+            <a:endParaRPr lang="en-US"/>
+          </a:p>
+        </p:txBody>
+      </p:sp>
+      <p:sp>
+        <p:nvSpPr>
+          <p:cNvPr id="3" name="Footer Placeholder 2"/>
+          <p:cNvSpPr>
+            <a:spLocks noGrp="1"/>
+          </p:cNvSpPr>
+          <p:nvPr>
+            <p:ph type="ftr" sz="quarter" idx="11"/>
+          </p:nvPr>
+        </p:nvSpPr>
+        <p:spPr/>
+        <p:txBody>
+          <a:bodyPr/>
+          <a:lstStyle/>
+          <a:p>
+            <a:endParaRPr lang="en-US"/>
+          </a:p>
+        </p:txBody>
+      </p:sp>
+      <p:sp>
+        <p:nvSpPr>
+          <p:cNvPr id="4" name="Slide Number Placeholder 3"/>
+          <p:cNvSpPr>
+            <a:spLocks noGrp="1"/>
+          </p:cNvSpPr>
+          <p:nvPr>
+            <p:ph type="sldNum" sz="quarter" idx="12"/>
+          </p:nvPr>
+        </p:nvSpPr>
+        <p:spPr>
+          <a:xfrm>
+            <a:off x="6245136" y="4767262"/>
+            <a:ext cx="308064" cy="307744"/>
+          </a:xfrm>
+        </p:spPr>
+        <p:txBody>
+          <a:bodyPr/>
+          <a:lstStyle/>
+          <a:p>
+            <a:fld id="{C1FF6DA9-008F-8B48-92A6-B652298478BF}" type="slidenum">
+              <a:rPr lang="en-US" smtClean="0"/>
+              <a:t>‹#›</a:t>
+            </a:fld>
+            <a:endParaRPr lang="en-US"/>
+          </a:p>
+        </p:txBody>
+      </p:sp>
+    </p:spTree>
+    <p:extLst>
+      <p:ext uri="{BB962C8B-B14F-4D97-AF65-F5344CB8AC3E}">
+        <p14:creationId xmlns:p14="http://schemas.microsoft.com/office/powerpoint/2010/main" val="1050794748"/>
+      </p:ext>
+    </p:extLst>
+  </p:cSld>
+  <p:clrMapOvr>
+    <a:masterClrMapping/>
+  </p:clrMapOvr>
+</p:sldLayout>
+</file>
+
 <file path=ppt/slideMasters/slideMaster1.xml><?xml version="1.0" encoding="utf-8"?>
 <p:sldMaster xmlns:a="http://schemas.openxmlformats.org/drawingml/2006/main" xmlns:r="http://schemas.openxmlformats.org/officeDocument/2006/relationships" xmlns:p="http://schemas.openxmlformats.org/presentationml/2006/main">
   <p:cSld>
@@ -612,7 +717,7 @@
           </a:ln>
           <a:extLst>
             <a:ext uri="{C572A759-6A51-4108-AA02-DFA0A04FC94B}">
-              <ma14:wrappingTextBoxFlag xmlns:ma14="http://schemas.microsoft.com/office/mac/drawingml/2011/main" xmlns:a14="http://schemas.microsoft.com/office/drawing/2010/main" xmlns:m="http://schemas.openxmlformats.org/officeDocument/2006/math" xmlns="" val="1"/>
+              <ma14:wrappingTextBoxFlag xmlns="" xmlns:m="http://schemas.openxmlformats.org/officeDocument/2006/math" xmlns:a14="http://schemas.microsoft.com/office/drawing/2010/main" xmlns:ma14="http://schemas.microsoft.com/office/mac/drawingml/2011/main" val="1"/>
             </a:ext>
           </a:extLst>
         </p:spPr>
@@ -651,7 +756,7 @@
           </a:ln>
           <a:extLst>
             <a:ext uri="{C572A759-6A51-4108-AA02-DFA0A04FC94B}">
-              <ma14:wrappingTextBoxFlag xmlns:ma14="http://schemas.microsoft.com/office/mac/drawingml/2011/main" xmlns:a14="http://schemas.microsoft.com/office/drawing/2010/main" xmlns:m="http://schemas.openxmlformats.org/officeDocument/2006/math" xmlns="" val="1"/>
+              <ma14:wrappingTextBoxFlag xmlns="" xmlns:m="http://schemas.openxmlformats.org/officeDocument/2006/math" xmlns:a14="http://schemas.microsoft.com/office/drawing/2010/main" xmlns:ma14="http://schemas.microsoft.com/office/mac/drawingml/2011/main" val="1"/>
             </a:ext>
           </a:extLst>
         </p:spPr>
@@ -741,6 +846,7 @@
   <p:clrMap bg1="lt1" tx1="dk1" bg2="lt2" tx2="dk2" accent1="accent1" accent2="accent2" accent3="accent3" accent4="accent4" accent5="accent5" accent6="accent6" hlink="hlink" folHlink="folHlink"/>
   <p:sldLayoutIdLst>
     <p:sldLayoutId id="2147483687" r:id="rId1"/>
+    <p:sldLayoutId id="2147483688" r:id="rId2"/>
   </p:sldLayoutIdLst>
   <p:transition spd="med"/>
   <p:txStyles>
@@ -1606,6 +1712,272 @@
 </p:sld>
 </file>
 
+<file path=ppt/slides/slide10.xml><?xml version="1.0" encoding="utf-8"?>
+<p:sld xmlns:a="http://schemas.openxmlformats.org/drawingml/2006/main" xmlns:r="http://schemas.openxmlformats.org/officeDocument/2006/relationships" xmlns:p="http://schemas.openxmlformats.org/presentationml/2006/main">
+  <p:cSld>
+    <p:spTree>
+      <p:nvGrpSpPr>
+        <p:cNvPr id="1" name=""/>
+        <p:cNvGrpSpPr/>
+        <p:nvPr/>
+      </p:nvGrpSpPr>
+      <p:grpSpPr>
+        <a:xfrm>
+          <a:off x="0" y="0"/>
+          <a:ext cx="0" cy="0"/>
+          <a:chOff x="0" y="0"/>
+          <a:chExt cx="0" cy="0"/>
+        </a:xfrm>
+      </p:grpSpPr>
+      <p:sp>
+        <p:nvSpPr>
+          <p:cNvPr id="2" name="Title 1">
+            <a:extLst>
+              <a:ext uri="{FF2B5EF4-FFF2-40B4-BE49-F238E27FC236}">
+                <a16:creationId xmlns:a16="http://schemas.microsoft.com/office/drawing/2014/main" id="{9D80F232-06F6-6582-38D5-590E6E4978E2}"/>
+              </a:ext>
+            </a:extLst>
+          </p:cNvPr>
+          <p:cNvSpPr>
+            <a:spLocks noGrp="1"/>
+          </p:cNvSpPr>
+          <p:nvPr>
+            <p:ph type="title"/>
+          </p:nvPr>
+        </p:nvSpPr>
+        <p:spPr>
+          <a:xfrm>
+            <a:off x="225824" y="137160"/>
+            <a:ext cx="8918176" cy="594000"/>
+          </a:xfrm>
+        </p:spPr>
+        <p:txBody>
+          <a:bodyPr>
+            <a:noAutofit/>
+          </a:bodyPr>
+          <a:lstStyle/>
+          <a:p>
+            <a:r>
+              <a:rPr lang="en-US" sz="1800" dirty="0"/>
+              <a:t>Primer on Agentic Systems – simplistic F script and primer on YouTube  </a:t>
+            </a:r>
+            <a:r>
+              <a:rPr lang="en-US" sz="1800" dirty="0">
+                <a:hlinkClick r:id="rId2"/>
+              </a:rPr>
+              <a:t>video</a:t>
+            </a:r>
+            <a:endParaRPr lang="en-US" sz="1800" dirty="0"/>
+          </a:p>
+        </p:txBody>
+      </p:sp>
+      <p:pic>
+        <p:nvPicPr>
+          <p:cNvPr id="4" name="Picture 3">
+            <a:extLst>
+              <a:ext uri="{FF2B5EF4-FFF2-40B4-BE49-F238E27FC236}">
+                <a16:creationId xmlns:a16="http://schemas.microsoft.com/office/drawing/2014/main" id="{10FA3AA4-43F2-07D5-210A-05208322D204}"/>
+              </a:ext>
+            </a:extLst>
+          </p:cNvPr>
+          <p:cNvPicPr>
+            <a:picLocks noChangeAspect="1"/>
+          </p:cNvPicPr>
+          <p:nvPr/>
+        </p:nvPicPr>
+        <p:blipFill>
+          <a:blip r:embed="rId3"/>
+          <a:stretch>
+            <a:fillRect/>
+          </a:stretch>
+        </p:blipFill>
+        <p:spPr>
+          <a:xfrm>
+            <a:off x="1698170" y="731160"/>
+            <a:ext cx="6645729" cy="3739834"/>
+          </a:xfrm>
+          <a:prstGeom prst="rect">
+            <a:avLst/>
+          </a:prstGeom>
+        </p:spPr>
+      </p:pic>
+      <p:sp>
+        <p:nvSpPr>
+          <p:cNvPr id="5" name="TextBox 4">
+            <a:extLst>
+              <a:ext uri="{FF2B5EF4-FFF2-40B4-BE49-F238E27FC236}">
+                <a16:creationId xmlns:a16="http://schemas.microsoft.com/office/drawing/2014/main" id="{7C073157-65BD-DD30-D69F-9BB6930A079E}"/>
+              </a:ext>
+            </a:extLst>
+          </p:cNvPr>
+          <p:cNvSpPr txBox="1"/>
+          <p:nvPr/>
+        </p:nvSpPr>
+        <p:spPr>
+          <a:xfrm>
+            <a:off x="0" y="4751616"/>
+            <a:ext cx="4572000" cy="307777"/>
+          </a:xfrm>
+          <a:prstGeom prst="rect">
+            <a:avLst/>
+          </a:prstGeom>
+          <a:noFill/>
+          <a:ln w="12700" cap="flat">
+            <a:noFill/>
+            <a:miter lim="400000"/>
+          </a:ln>
+          <a:effectLst/>
+          <a:sp3d/>
+        </p:spPr>
+        <p:style>
+          <a:lnRef idx="0">
+            <a:scrgbClr r="0" g="0" b="0"/>
+          </a:lnRef>
+          <a:fillRef idx="0">
+            <a:scrgbClr r="0" g="0" b="0"/>
+          </a:fillRef>
+          <a:effectRef idx="0">
+            <a:scrgbClr r="0" g="0" b="0"/>
+          </a:effectRef>
+          <a:fontRef idx="none"/>
+        </p:style>
+        <p:txBody>
+          <a:bodyPr wrap="square">
+            <a:spAutoFit/>
+          </a:bodyPr>
+          <a:lstStyle/>
+          <a:p>
+            <a:r>
+              <a:rPr lang="en-US" dirty="0">
+                <a:hlinkClick r:id="rId4"/>
+              </a:rPr>
+              <a:t>https://www.youtube.com/watch?v=sal78ACtGTc</a:t>
+            </a:r>
+            <a:endParaRPr lang="en-US" dirty="0"/>
+          </a:p>
+        </p:txBody>
+      </p:sp>
+    </p:spTree>
+    <p:extLst>
+      <p:ext uri="{BB962C8B-B14F-4D97-AF65-F5344CB8AC3E}">
+        <p14:creationId xmlns:p14="http://schemas.microsoft.com/office/powerpoint/2010/main" val="502592210"/>
+      </p:ext>
+    </p:extLst>
+  </p:cSld>
+  <p:clrMapOvr>
+    <a:masterClrMapping/>
+  </p:clrMapOvr>
+  <p:transition spd="med"/>
+</p:sld>
+</file>
+
+<file path=ppt/slides/slide11.xml><?xml version="1.0" encoding="utf-8"?>
+<p:sld xmlns:a="http://schemas.openxmlformats.org/drawingml/2006/main" xmlns:r="http://schemas.openxmlformats.org/officeDocument/2006/relationships" xmlns:p="http://schemas.openxmlformats.org/presentationml/2006/main">
+  <p:cSld>
+    <p:spTree>
+      <p:nvGrpSpPr>
+        <p:cNvPr id="1" name="">
+          <a:extLst>
+            <a:ext uri="{FF2B5EF4-FFF2-40B4-BE49-F238E27FC236}">
+              <a16:creationId xmlns:a16="http://schemas.microsoft.com/office/drawing/2014/main" id="{9D35CA45-4AC3-07CF-72E3-F4A4A03E88D4}"/>
+            </a:ext>
+          </a:extLst>
+        </p:cNvPr>
+        <p:cNvGrpSpPr/>
+        <p:nvPr/>
+      </p:nvGrpSpPr>
+      <p:grpSpPr>
+        <a:xfrm>
+          <a:off x="0" y="0"/>
+          <a:ext cx="0" cy="0"/>
+          <a:chOff x="0" y="0"/>
+          <a:chExt cx="0" cy="0"/>
+        </a:xfrm>
+      </p:grpSpPr>
+      <p:sp>
+        <p:nvSpPr>
+          <p:cNvPr id="2" name="Title 1">
+            <a:extLst>
+              <a:ext uri="{FF2B5EF4-FFF2-40B4-BE49-F238E27FC236}">
+                <a16:creationId xmlns:a16="http://schemas.microsoft.com/office/drawing/2014/main" id="{5A14A05D-6EDB-29FA-FDC8-BA9AFD2D2A1A}"/>
+              </a:ext>
+            </a:extLst>
+          </p:cNvPr>
+          <p:cNvSpPr>
+            <a:spLocks noGrp="1"/>
+          </p:cNvSpPr>
+          <p:nvPr>
+            <p:ph type="title"/>
+          </p:nvPr>
+        </p:nvSpPr>
+        <p:spPr>
+          <a:xfrm>
+            <a:off x="225824" y="1427117"/>
+            <a:ext cx="3456269" cy="594000"/>
+          </a:xfrm>
+        </p:spPr>
+        <p:txBody>
+          <a:bodyPr>
+            <a:noAutofit/>
+          </a:bodyPr>
+          <a:lstStyle/>
+          <a:p>
+            <a:r>
+              <a:rPr lang="en-US" sz="1800" dirty="0"/>
+              <a:t>Open </a:t>
+            </a:r>
+            <a:r>
+              <a:rPr lang="en-US" sz="1800" dirty="0" err="1"/>
+              <a:t>F_agenticExample_w_agency.R</a:t>
+            </a:r>
+            <a:endParaRPr lang="en-US" sz="1800" dirty="0"/>
+          </a:p>
+        </p:txBody>
+      </p:sp>
+      <p:pic>
+        <p:nvPicPr>
+          <p:cNvPr id="4" name="Picture 3">
+            <a:extLst>
+              <a:ext uri="{FF2B5EF4-FFF2-40B4-BE49-F238E27FC236}">
+                <a16:creationId xmlns:a16="http://schemas.microsoft.com/office/drawing/2014/main" id="{6A5BC1A9-5FF8-46AE-E3F1-9EBEDAD8E6B5}"/>
+              </a:ext>
+            </a:extLst>
+          </p:cNvPr>
+          <p:cNvPicPr>
+            <a:picLocks noChangeAspect="1"/>
+          </p:cNvPicPr>
+          <p:nvPr/>
+        </p:nvPicPr>
+        <p:blipFill>
+          <a:blip r:embed="rId2"/>
+          <a:stretch>
+            <a:fillRect/>
+          </a:stretch>
+        </p:blipFill>
+        <p:spPr>
+          <a:xfrm>
+            <a:off x="4139293" y="0"/>
+            <a:ext cx="5143500" cy="5143500"/>
+          </a:xfrm>
+          <a:prstGeom prst="rect">
+            <a:avLst/>
+          </a:prstGeom>
+        </p:spPr>
+      </p:pic>
+    </p:spTree>
+    <p:extLst>
+      <p:ext uri="{BB962C8B-B14F-4D97-AF65-F5344CB8AC3E}">
+        <p14:creationId xmlns:p14="http://schemas.microsoft.com/office/powerpoint/2010/main" val="912411813"/>
+      </p:ext>
+    </p:extLst>
+  </p:cSld>
+  <p:clrMapOvr>
+    <a:masterClrMapping/>
+  </p:clrMapOvr>
+  <p:transition spd="med"/>
+</p:sld>
+</file>
+
 <file path=ppt/slides/slide2.xml><?xml version="1.0" encoding="utf-8"?>
 <p:sld xmlns:a="http://schemas.openxmlformats.org/drawingml/2006/main" xmlns:r="http://schemas.openxmlformats.org/officeDocument/2006/relationships" xmlns:p="http://schemas.openxmlformats.org/presentationml/2006/main">
   <p:cSld>
@@ -1842,7 +2214,7 @@
                   <a:srgbClr val="FAFAFF"/>
                 </a:solidFill>
               </a:rPr>
-              <a:t>Instead, agentic workflows involve a cyclical process where AI systems continually refine their outputs, learn from interactions, and contribute more effectively over time</a:t>
+              <a:t>Instead, agentic workflows involve a looping process where AI systems continually refine their outputs, learn from interactions, and contribute more effectively over time</a:t>
             </a:r>
           </a:p>
         </p:txBody>
@@ -1989,12 +2361,1335 @@
           </a:extLst>
         </p:spPr>
       </p:pic>
+    </p:spTree>
+    <p:extLst>
+      <p:ext uri="{BB962C8B-B14F-4D97-AF65-F5344CB8AC3E}">
+        <p14:creationId xmlns:p14="http://schemas.microsoft.com/office/powerpoint/2010/main" val="2436412405"/>
+      </p:ext>
+    </p:extLst>
+  </p:cSld>
+  <p:clrMapOvr>
+    <a:masterClrMapping/>
+  </p:clrMapOvr>
+  <p:transition spd="med"/>
+</p:sld>
+</file>
+
+<file path=ppt/slides/slide4.xml><?xml version="1.0" encoding="utf-8"?>
+<p:sld xmlns:a="http://schemas.openxmlformats.org/drawingml/2006/main" xmlns:r="http://schemas.openxmlformats.org/officeDocument/2006/relationships" xmlns:p="http://schemas.openxmlformats.org/presentationml/2006/main">
+  <p:cSld>
+    <p:spTree>
+      <p:nvGrpSpPr>
+        <p:cNvPr id="1" name=""/>
+        <p:cNvGrpSpPr/>
+        <p:nvPr/>
+      </p:nvGrpSpPr>
+      <p:grpSpPr>
+        <a:xfrm>
+          <a:off x="0" y="0"/>
+          <a:ext cx="0" cy="0"/>
+          <a:chOff x="0" y="0"/>
+          <a:chExt cx="0" cy="0"/>
+        </a:xfrm>
+      </p:grpSpPr>
+      <p:pic>
+        <p:nvPicPr>
+          <p:cNvPr id="2" name="Picture 1" descr="image2.png"/>
+          <p:cNvPicPr>
+            <a:picLocks noChangeAspect="1"/>
+          </p:cNvPicPr>
+          <p:nvPr/>
+        </p:nvPicPr>
+        <p:blipFill>
+          <a:blip r:embed="rId2"/>
+          <a:srcRect t="6239" b="6239"/>
+          <a:stretch>
+            <a:fillRect/>
+          </a:stretch>
+        </p:blipFill>
+        <p:spPr>
+          <a:xfrm>
+            <a:off x="4526281" y="0"/>
+            <a:ext cx="4617491" cy="5143500"/>
+          </a:xfrm>
+          <a:prstGeom prst="rect">
+            <a:avLst/>
+          </a:prstGeom>
+        </p:spPr>
+      </p:pic>
       <p:sp>
         <p:nvSpPr>
-          <p:cNvPr id="4" name="TextBox 3">
+          <p:cNvPr id="3" name="TextBox 2"/>
+          <p:cNvSpPr txBox="1"/>
+          <p:nvPr/>
+        </p:nvSpPr>
+        <p:spPr>
+          <a:xfrm>
+            <a:off x="377190" y="1097280"/>
+            <a:ext cx="3840480" cy="2269147"/>
+          </a:xfrm>
+          <a:prstGeom prst="rect">
+            <a:avLst/>
+          </a:prstGeom>
+          <a:noFill/>
+        </p:spPr>
+        <p:txBody>
+          <a:bodyPr wrap="square" lIns="0" tIns="0" rIns="0" bIns="0" anchor="t">
+            <a:spAutoFit/>
+          </a:bodyPr>
+          <a:lstStyle/>
+          <a:p>
+            <a:pPr>
+              <a:lnSpc>
+                <a:spcPct val="95000"/>
+              </a:lnSpc>
+              <a:spcAft>
+                <a:spcPts val="1050"/>
+              </a:spcAft>
+            </a:pPr>
+            <a:r>
+              <a:rPr sz="2850" dirty="0">
+                <a:solidFill>
+                  <a:srgbClr val="0099FF"/>
+                </a:solidFill>
+                <a:latin typeface="Arial Black"/>
+              </a:rPr>
+              <a:t>A prompt chain is a software team</a:t>
+            </a:r>
+          </a:p>
+          <a:p>
+            <a:pPr>
+              <a:spcAft>
+                <a:spcPts val="300"/>
+              </a:spcAft>
+            </a:pPr>
+            <a:r>
+              <a:rPr sz="1425" dirty="0">
+                <a:solidFill>
+                  <a:srgbClr val="FFFFFF"/>
+                </a:solidFill>
+                <a:latin typeface="Arial"/>
+              </a:rPr>
+              <a:t>Four specialist agents pass work down the line:</a:t>
+            </a:r>
+          </a:p>
+          <a:p>
+            <a:pPr>
+              <a:spcAft>
+                <a:spcPts val="1200"/>
+              </a:spcAft>
+            </a:pPr>
+            <a:r>
+              <a:rPr sz="1425" b="1" dirty="0">
+                <a:solidFill>
+                  <a:srgbClr val="FFFFFF"/>
+                </a:solidFill>
+                <a:latin typeface="Arial"/>
+              </a:rPr>
+              <a:t>Product Owner  →  QC  →  Tech Writer  →  Programmer</a:t>
+            </a:r>
+          </a:p>
+          <a:p>
+            <a:pPr>
+              <a:lnSpc>
+                <a:spcPct val="105000"/>
+              </a:lnSpc>
+              <a:spcAft>
+                <a:spcPts val="450"/>
+              </a:spcAft>
+            </a:pPr>
+            <a:r>
+              <a:rPr lang="en-US" sz="1425" b="1" dirty="0">
+                <a:solidFill>
+                  <a:srgbClr val="FFC000"/>
+                </a:solidFill>
+                <a:latin typeface="Arial"/>
+              </a:rPr>
+              <a:t>In modern workflows, the </a:t>
+            </a:r>
+            <a:r>
+              <a:rPr sz="1425" b="1" dirty="0">
+                <a:solidFill>
+                  <a:srgbClr val="FFC000"/>
+                </a:solidFill>
+                <a:latin typeface="Arial"/>
+              </a:rPr>
+              <a:t>order of the work has flipped.</a:t>
+            </a:r>
+          </a:p>
+        </p:txBody>
+      </p:sp>
+    </p:spTree>
+  </p:cSld>
+  <p:clrMapOvr>
+    <a:masterClrMapping/>
+  </p:clrMapOvr>
+</p:sld>
+</file>
+
+<file path=ppt/slides/slide5.xml><?xml version="1.0" encoding="utf-8"?>
+<p:sld xmlns:a="http://schemas.openxmlformats.org/drawingml/2006/main" xmlns:r="http://schemas.openxmlformats.org/officeDocument/2006/relationships" xmlns:p="http://schemas.openxmlformats.org/presentationml/2006/main">
+  <p:cSld>
+    <p:spTree>
+      <p:nvGrpSpPr>
+        <p:cNvPr id="1" name=""/>
+        <p:cNvGrpSpPr/>
+        <p:nvPr/>
+      </p:nvGrpSpPr>
+      <p:grpSpPr>
+        <a:xfrm>
+          <a:off x="0" y="0"/>
+          <a:ext cx="0" cy="0"/>
+          <a:chOff x="0" y="0"/>
+          <a:chExt cx="0" cy="0"/>
+        </a:xfrm>
+      </p:grpSpPr>
+      <p:sp>
+        <p:nvSpPr>
+          <p:cNvPr id="3" name="TextBox 2"/>
+          <p:cNvSpPr txBox="1"/>
+          <p:nvPr/>
+        </p:nvSpPr>
+        <p:spPr>
+          <a:xfrm>
+            <a:off x="377190" y="480061"/>
+            <a:ext cx="3840480" cy="789447"/>
+          </a:xfrm>
+          <a:prstGeom prst="rect">
+            <a:avLst/>
+          </a:prstGeom>
+          <a:noFill/>
+        </p:spPr>
+        <p:txBody>
+          <a:bodyPr wrap="square" lIns="0" tIns="0" rIns="0" bIns="0" anchor="t">
+            <a:spAutoFit/>
+          </a:bodyPr>
+          <a:lstStyle/>
+          <a:p>
+            <a:pPr>
+              <a:lnSpc>
+                <a:spcPct val="95000"/>
+              </a:lnSpc>
+              <a:spcAft>
+                <a:spcPts val="450"/>
+              </a:spcAft>
+            </a:pPr>
+            <a:r>
+              <a:rPr sz="2700" dirty="0">
+                <a:solidFill>
+                  <a:srgbClr val="FFFFFF"/>
+                </a:solidFill>
+                <a:latin typeface="Arial Black"/>
+              </a:rPr>
+              <a:t>The old way: code first</a:t>
+            </a:r>
+          </a:p>
+        </p:txBody>
+      </p:sp>
+      <p:sp>
+        <p:nvSpPr>
+          <p:cNvPr id="4" name="TextBox 3"/>
+          <p:cNvSpPr txBox="1"/>
+          <p:nvPr/>
+        </p:nvSpPr>
+        <p:spPr>
+          <a:xfrm>
+            <a:off x="377190" y="1714500"/>
+            <a:ext cx="3840480" cy="1088247"/>
+          </a:xfrm>
+          <a:prstGeom prst="rect">
+            <a:avLst/>
+          </a:prstGeom>
+          <a:noFill/>
+        </p:spPr>
+        <p:txBody>
+          <a:bodyPr wrap="square" lIns="0" tIns="0" rIns="0" bIns="0" anchor="t">
+            <a:spAutoFit/>
+          </a:bodyPr>
+          <a:lstStyle/>
+          <a:p>
+            <a:pPr>
+              <a:lnSpc>
+                <a:spcPct val="105000"/>
+              </a:lnSpc>
+              <a:spcAft>
+                <a:spcPts val="900"/>
+              </a:spcAft>
+            </a:pPr>
+            <a:r>
+              <a:rPr sz="1350" dirty="0">
+                <a:solidFill>
+                  <a:srgbClr val="FFFFFF"/>
+                </a:solidFill>
+                <a:latin typeface="Arial"/>
+              </a:rPr>
+              <a:t>•  A developer starts typing from a vague request</a:t>
+            </a:r>
+            <a:r>
+              <a:rPr lang="en-US" sz="1350" dirty="0">
+                <a:solidFill>
+                  <a:srgbClr val="FFFFFF"/>
+                </a:solidFill>
+                <a:latin typeface="Arial"/>
+              </a:rPr>
+              <a:t>  “user story”</a:t>
+            </a:r>
+            <a:r>
+              <a:rPr sz="1350" dirty="0">
+                <a:solidFill>
+                  <a:srgbClr val="FFFFFF"/>
+                </a:solidFill>
+                <a:latin typeface="Arial"/>
+              </a:rPr>
+              <a:t>.</a:t>
+            </a:r>
+          </a:p>
+          <a:p>
+            <a:pPr>
+              <a:lnSpc>
+                <a:spcPct val="105000"/>
+              </a:lnSpc>
+              <a:spcAft>
+                <a:spcPts val="900"/>
+              </a:spcAft>
+            </a:pPr>
+            <a:r>
+              <a:rPr sz="1350" dirty="0">
+                <a:solidFill>
+                  <a:srgbClr val="FFFFFF"/>
+                </a:solidFill>
+                <a:latin typeface="Arial"/>
+              </a:rPr>
+              <a:t>•  Spec and tests come later</a:t>
+            </a:r>
+            <a:r>
+              <a:rPr lang="en-US" sz="1350" dirty="0">
+                <a:solidFill>
+                  <a:srgbClr val="FFFFFF"/>
+                </a:solidFill>
+                <a:latin typeface="Arial"/>
+              </a:rPr>
+              <a:t>, </a:t>
+            </a:r>
+            <a:r>
+              <a:rPr sz="1350" dirty="0">
+                <a:solidFill>
+                  <a:srgbClr val="FFFFFF"/>
+                </a:solidFill>
+                <a:latin typeface="Arial"/>
+              </a:rPr>
+              <a:t>if they come at all.</a:t>
+            </a:r>
+          </a:p>
+          <a:p>
+            <a:pPr>
+              <a:lnSpc>
+                <a:spcPct val="105000"/>
+              </a:lnSpc>
+              <a:spcAft>
+                <a:spcPts val="900"/>
+              </a:spcAft>
+            </a:pPr>
+            <a:r>
+              <a:rPr sz="1350" dirty="0">
+                <a:solidFill>
+                  <a:srgbClr val="FFFFFF"/>
+                </a:solidFill>
+                <a:latin typeface="Arial"/>
+              </a:rPr>
+              <a:t>•  “Done” means “it ran on my machine.”</a:t>
+            </a:r>
+          </a:p>
+        </p:txBody>
+      </p:sp>
+      <p:sp>
+        <p:nvSpPr>
+          <p:cNvPr id="5" name="Rectangle 4"/>
+          <p:cNvSpPr/>
+          <p:nvPr/>
+        </p:nvSpPr>
+        <p:spPr>
+          <a:xfrm>
+            <a:off x="377190" y="4114800"/>
+            <a:ext cx="3840480" cy="651510"/>
+          </a:xfrm>
+          <a:prstGeom prst="rect">
+            <a:avLst/>
+          </a:prstGeom>
+          <a:solidFill>
+            <a:srgbClr val="0099FF"/>
+          </a:solidFill>
+          <a:ln>
+            <a:noFill/>
+          </a:ln>
+          <a:effectLst/>
+        </p:spPr>
+        <p:style>
+          <a:lnRef idx="1">
+            <a:schemeClr val="accent1"/>
+          </a:lnRef>
+          <a:fillRef idx="3">
+            <a:schemeClr val="accent1"/>
+          </a:fillRef>
+          <a:effectRef idx="2">
+            <a:schemeClr val="accent1"/>
+          </a:effectRef>
+          <a:fontRef idx="minor">
+            <a:schemeClr val="lt1"/>
+          </a:fontRef>
+        </p:style>
+        <p:txBody>
+          <a:bodyPr wrap="square" lIns="102870" tIns="54864" rIns="102870" bIns="54864" rtlCol="0" anchor="ctr"/>
+          <a:lstStyle/>
+          <a:p>
+            <a:pPr algn="ctr"/>
+            <a:r>
+              <a:rPr sz="1275" b="1">
+                <a:solidFill>
+                  <a:srgbClr val="FFFFFF"/>
+                </a:solidFill>
+                <a:latin typeface="Arial"/>
+              </a:rPr>
+              <a:t>Vague prompt in → inconsistent, often broken artifact out.</a:t>
+            </a:r>
+          </a:p>
+        </p:txBody>
+      </p:sp>
+      <p:pic>
+        <p:nvPicPr>
+          <p:cNvPr id="6" name="Picture 5">
             <a:extLst>
               <a:ext uri="{FF2B5EF4-FFF2-40B4-BE49-F238E27FC236}">
-                <a16:creationId xmlns:a16="http://schemas.microsoft.com/office/drawing/2014/main" id="{71E70D64-1CB8-EF7A-032C-D03AFC5DA964}"/>
+                <a16:creationId xmlns:a16="http://schemas.microsoft.com/office/drawing/2014/main" id="{884D1777-362A-4718-C3D8-DEDFF929F2F7}"/>
+              </a:ext>
+            </a:extLst>
+          </p:cNvPr>
+          <p:cNvPicPr>
+            <a:picLocks noChangeAspect="1"/>
+          </p:cNvPicPr>
+          <p:nvPr/>
+        </p:nvPicPr>
+        <p:blipFill>
+          <a:blip r:embed="rId2"/>
+          <a:srcRect l="11111"/>
+          <a:stretch>
+            <a:fillRect/>
+          </a:stretch>
+        </p:blipFill>
+        <p:spPr>
+          <a:xfrm flipH="1">
+            <a:off x="4572000" y="12860"/>
+            <a:ext cx="4572000" cy="5143500"/>
+          </a:xfrm>
+          <a:prstGeom prst="rect">
+            <a:avLst/>
+          </a:prstGeom>
+        </p:spPr>
+      </p:pic>
+    </p:spTree>
+  </p:cSld>
+  <p:clrMapOvr>
+    <a:masterClrMapping/>
+  </p:clrMapOvr>
+</p:sld>
+</file>
+
+<file path=ppt/slides/slide6.xml><?xml version="1.0" encoding="utf-8"?>
+<p:sld xmlns:a="http://schemas.openxmlformats.org/drawingml/2006/main" xmlns:r="http://schemas.openxmlformats.org/officeDocument/2006/relationships" xmlns:p="http://schemas.openxmlformats.org/presentationml/2006/main">
+  <p:cSld>
+    <p:spTree>
+      <p:nvGrpSpPr>
+        <p:cNvPr id="1" name=""/>
+        <p:cNvGrpSpPr/>
+        <p:nvPr/>
+      </p:nvGrpSpPr>
+      <p:grpSpPr>
+        <a:xfrm>
+          <a:off x="0" y="0"/>
+          <a:ext cx="0" cy="0"/>
+          <a:chOff x="0" y="0"/>
+          <a:chExt cx="0" cy="0"/>
+        </a:xfrm>
+      </p:grpSpPr>
+      <p:sp>
+        <p:nvSpPr>
+          <p:cNvPr id="3" name="TextBox 2"/>
+          <p:cNvSpPr txBox="1"/>
+          <p:nvPr/>
+        </p:nvSpPr>
+        <p:spPr>
+          <a:xfrm>
+            <a:off x="377190" y="480060"/>
+            <a:ext cx="3840480" cy="745589"/>
+          </a:xfrm>
+          <a:prstGeom prst="rect">
+            <a:avLst/>
+          </a:prstGeom>
+          <a:noFill/>
+        </p:spPr>
+        <p:txBody>
+          <a:bodyPr wrap="square" lIns="0" tIns="0" rIns="0" bIns="0" anchor="t">
+            <a:spAutoFit/>
+          </a:bodyPr>
+          <a:lstStyle/>
+          <a:p>
+            <a:pPr>
+              <a:lnSpc>
+                <a:spcPct val="95000"/>
+              </a:lnSpc>
+              <a:spcAft>
+                <a:spcPts val="450"/>
+              </a:spcAft>
+            </a:pPr>
+            <a:r>
+              <a:rPr sz="2550">
+                <a:solidFill>
+                  <a:srgbClr val="0099FF"/>
+                </a:solidFill>
+                <a:latin typeface="Arial Black"/>
+              </a:rPr>
+              <a:t>The new way: spec-first, test-first</a:t>
+            </a:r>
+          </a:p>
+        </p:txBody>
+      </p:sp>
+      <p:sp>
+        <p:nvSpPr>
+          <p:cNvPr id="4" name="TextBox 3"/>
+          <p:cNvSpPr txBox="1"/>
+          <p:nvPr/>
+        </p:nvSpPr>
+        <p:spPr>
+          <a:xfrm>
+            <a:off x="377190" y="1543051"/>
+            <a:ext cx="3840480" cy="1719702"/>
+          </a:xfrm>
+          <a:prstGeom prst="rect">
+            <a:avLst/>
+          </a:prstGeom>
+          <a:noFill/>
+        </p:spPr>
+        <p:txBody>
+          <a:bodyPr wrap="square" lIns="0" tIns="0" rIns="0" bIns="0" anchor="t">
+            <a:spAutoFit/>
+          </a:bodyPr>
+          <a:lstStyle/>
+          <a:p>
+            <a:pPr>
+              <a:spcAft>
+                <a:spcPts val="900"/>
+              </a:spcAft>
+            </a:pPr>
+            <a:r>
+              <a:rPr sz="1275" b="1" dirty="0">
+                <a:solidFill>
+                  <a:srgbClr val="0099FF"/>
+                </a:solidFill>
+                <a:latin typeface="Arial Black"/>
+              </a:rPr>
+              <a:t>1   </a:t>
+            </a:r>
+            <a:r>
+              <a:rPr sz="1275" dirty="0">
+                <a:solidFill>
+                  <a:srgbClr val="FFFFFF"/>
+                </a:solidFill>
+                <a:latin typeface="Arial"/>
+              </a:rPr>
+              <a:t>Product Owner writes the functional spec</a:t>
+            </a:r>
+            <a:r>
+              <a:rPr lang="en-US" sz="1275" dirty="0">
+                <a:solidFill>
+                  <a:srgbClr val="FFFFFF"/>
+                </a:solidFill>
+                <a:latin typeface="Arial"/>
+              </a:rPr>
+              <a:t> because the prompt and described output is the code basis.</a:t>
+            </a:r>
+            <a:endParaRPr sz="1275" dirty="0">
+              <a:solidFill>
+                <a:srgbClr val="FFFFFF"/>
+              </a:solidFill>
+              <a:latin typeface="Arial"/>
+            </a:endParaRPr>
+          </a:p>
+          <a:p>
+            <a:pPr>
+              <a:spcAft>
+                <a:spcPts val="900"/>
+              </a:spcAft>
+            </a:pPr>
+            <a:r>
+              <a:rPr sz="1275" b="1" dirty="0">
+                <a:solidFill>
+                  <a:srgbClr val="0099FF"/>
+                </a:solidFill>
+                <a:latin typeface="Arial Black"/>
+              </a:rPr>
+              <a:t>2   </a:t>
+            </a:r>
+            <a:r>
+              <a:rPr sz="1275" dirty="0">
+                <a:solidFill>
+                  <a:srgbClr val="FFFFFF"/>
+                </a:solidFill>
+                <a:latin typeface="Arial"/>
+              </a:rPr>
+              <a:t>QC writes the regression checklist</a:t>
+            </a:r>
+            <a:r>
+              <a:rPr lang="en-US" sz="1275" dirty="0">
+                <a:solidFill>
+                  <a:srgbClr val="FFFFFF"/>
+                </a:solidFill>
+                <a:latin typeface="Arial"/>
+              </a:rPr>
+              <a:t>, </a:t>
+            </a:r>
+            <a:r>
+              <a:rPr sz="1275" dirty="0">
+                <a:solidFill>
+                  <a:srgbClr val="FFFFFF"/>
+                </a:solidFill>
+                <a:latin typeface="Arial"/>
+              </a:rPr>
+              <a:t>before any code</a:t>
+            </a:r>
+            <a:r>
+              <a:rPr lang="en-US" sz="1275" dirty="0">
+                <a:solidFill>
+                  <a:srgbClr val="FFFFFF"/>
+                </a:solidFill>
+                <a:latin typeface="Arial"/>
+              </a:rPr>
+              <a:t> is written</a:t>
+            </a:r>
+            <a:endParaRPr sz="1275" dirty="0">
+              <a:solidFill>
+                <a:srgbClr val="FFFFFF"/>
+              </a:solidFill>
+              <a:latin typeface="Arial"/>
+            </a:endParaRPr>
+          </a:p>
+          <a:p>
+            <a:pPr>
+              <a:spcAft>
+                <a:spcPts val="900"/>
+              </a:spcAft>
+            </a:pPr>
+            <a:r>
+              <a:rPr sz="1275" b="1" dirty="0">
+                <a:solidFill>
+                  <a:srgbClr val="0099FF"/>
+                </a:solidFill>
+                <a:latin typeface="Arial Black"/>
+              </a:rPr>
+              <a:t>3   </a:t>
+            </a:r>
+            <a:r>
+              <a:rPr sz="1275" dirty="0">
+                <a:solidFill>
+                  <a:srgbClr val="FFFFFF"/>
+                </a:solidFill>
+                <a:latin typeface="Arial"/>
+              </a:rPr>
+              <a:t>Tech Writer documents the intended behavior</a:t>
+            </a:r>
+          </a:p>
+          <a:p>
+            <a:pPr>
+              <a:spcAft>
+                <a:spcPts val="900"/>
+              </a:spcAft>
+            </a:pPr>
+            <a:r>
+              <a:rPr sz="1275" b="1" dirty="0">
+                <a:solidFill>
+                  <a:srgbClr val="0099FF"/>
+                </a:solidFill>
+                <a:latin typeface="Arial Black"/>
+              </a:rPr>
+              <a:t>4   </a:t>
+            </a:r>
+            <a:r>
+              <a:rPr sz="1275" dirty="0">
+                <a:solidFill>
+                  <a:srgbClr val="FFFFFF"/>
+                </a:solidFill>
+                <a:latin typeface="Arial"/>
+              </a:rPr>
+              <a:t>Programmer builds last, to pass the checklist</a:t>
+            </a:r>
+          </a:p>
+        </p:txBody>
+      </p:sp>
+      <p:sp>
+        <p:nvSpPr>
+          <p:cNvPr id="5" name="TextBox 4"/>
+          <p:cNvSpPr txBox="1"/>
+          <p:nvPr/>
+        </p:nvSpPr>
+        <p:spPr>
+          <a:xfrm>
+            <a:off x="377190" y="4149090"/>
+            <a:ext cx="3840480" cy="203004"/>
+          </a:xfrm>
+          <a:prstGeom prst="rect">
+            <a:avLst/>
+          </a:prstGeom>
+          <a:noFill/>
+        </p:spPr>
+        <p:txBody>
+          <a:bodyPr wrap="square" lIns="0" tIns="0" rIns="0" bIns="0" anchor="t">
+            <a:spAutoFit/>
+          </a:bodyPr>
+          <a:lstStyle/>
+          <a:p>
+            <a:pPr>
+              <a:lnSpc>
+                <a:spcPct val="105000"/>
+              </a:lnSpc>
+              <a:spcAft>
+                <a:spcPts val="450"/>
+              </a:spcAft>
+            </a:pPr>
+            <a:r>
+              <a:rPr sz="1350" b="1">
+                <a:solidFill>
+                  <a:srgbClr val="FFC000"/>
+                </a:solidFill>
+                <a:latin typeface="Arial"/>
+              </a:rPr>
+              <a:t>Success is defined before a line of code exists.</a:t>
+            </a:r>
+          </a:p>
+        </p:txBody>
+      </p:sp>
+      <p:pic>
+        <p:nvPicPr>
+          <p:cNvPr id="6" name="Picture 5">
+            <a:extLst>
+              <a:ext uri="{FF2B5EF4-FFF2-40B4-BE49-F238E27FC236}">
+                <a16:creationId xmlns:a16="http://schemas.microsoft.com/office/drawing/2014/main" id="{5E9ACFBA-C31B-5F59-446C-5809FA08CC0C}"/>
+              </a:ext>
+            </a:extLst>
+          </p:cNvPr>
+          <p:cNvPicPr>
+            <a:picLocks noChangeAspect="1"/>
+          </p:cNvPicPr>
+          <p:nvPr/>
+        </p:nvPicPr>
+        <p:blipFill>
+          <a:blip r:embed="rId2"/>
+          <a:srcRect r="20064"/>
+          <a:stretch>
+            <a:fillRect/>
+          </a:stretch>
+        </p:blipFill>
+        <p:spPr>
+          <a:xfrm>
+            <a:off x="5032469" y="0"/>
+            <a:ext cx="4111531" cy="5143500"/>
+          </a:xfrm>
+          <a:prstGeom prst="rect">
+            <a:avLst/>
+          </a:prstGeom>
+        </p:spPr>
+      </p:pic>
+    </p:spTree>
+  </p:cSld>
+  <p:clrMapOvr>
+    <a:masterClrMapping/>
+  </p:clrMapOvr>
+</p:sld>
+</file>
+
+<file path=ppt/slides/slide7.xml><?xml version="1.0" encoding="utf-8"?>
+<p:sld xmlns:a="http://schemas.openxmlformats.org/drawingml/2006/main" xmlns:r="http://schemas.openxmlformats.org/officeDocument/2006/relationships" xmlns:p="http://schemas.openxmlformats.org/presentationml/2006/main">
+  <p:cSld>
+    <p:spTree>
+      <p:nvGrpSpPr>
+        <p:cNvPr id="1" name=""/>
+        <p:cNvGrpSpPr/>
+        <p:nvPr/>
+      </p:nvGrpSpPr>
+      <p:grpSpPr>
+        <a:xfrm>
+          <a:off x="0" y="0"/>
+          <a:ext cx="0" cy="0"/>
+          <a:chOff x="0" y="0"/>
+          <a:chExt cx="0" cy="0"/>
+        </a:xfrm>
+      </p:grpSpPr>
+      <p:sp>
+        <p:nvSpPr>
+          <p:cNvPr id="3" name="TextBox 2"/>
+          <p:cNvSpPr txBox="1"/>
+          <p:nvPr/>
+        </p:nvSpPr>
+        <p:spPr>
+          <a:xfrm>
+            <a:off x="377190" y="480060"/>
+            <a:ext cx="3840480" cy="1007584"/>
+          </a:xfrm>
+          <a:prstGeom prst="rect">
+            <a:avLst/>
+          </a:prstGeom>
+          <a:noFill/>
+        </p:spPr>
+        <p:txBody>
+          <a:bodyPr wrap="square" lIns="0" tIns="0" rIns="0" bIns="0" anchor="t">
+            <a:spAutoFit/>
+          </a:bodyPr>
+          <a:lstStyle/>
+          <a:p>
+            <a:pPr>
+              <a:lnSpc>
+                <a:spcPct val="97000"/>
+              </a:lnSpc>
+              <a:spcAft>
+                <a:spcPts val="450"/>
+              </a:spcAft>
+            </a:pPr>
+            <a:r>
+              <a:rPr sz="2250">
+                <a:solidFill>
+                  <a:srgbClr val="0099FF"/>
+                </a:solidFill>
+                <a:latin typeface="Arial Black"/>
+              </a:rPr>
+              <a:t>Why flip the order? Now you can test the prompts.</a:t>
+            </a:r>
+          </a:p>
+        </p:txBody>
+      </p:sp>
+      <p:sp>
+        <p:nvSpPr>
+          <p:cNvPr id="4" name="TextBox 3"/>
+          <p:cNvSpPr txBox="1"/>
+          <p:nvPr/>
+        </p:nvSpPr>
+        <p:spPr>
+          <a:xfrm>
+            <a:off x="377190" y="1851661"/>
+            <a:ext cx="3840480" cy="1190967"/>
+          </a:xfrm>
+          <a:prstGeom prst="rect">
+            <a:avLst/>
+          </a:prstGeom>
+          <a:noFill/>
+        </p:spPr>
+        <p:txBody>
+          <a:bodyPr wrap="square" lIns="0" tIns="0" rIns="0" bIns="0" anchor="t">
+            <a:spAutoFit/>
+          </a:bodyPr>
+          <a:lstStyle/>
+          <a:p>
+            <a:pPr>
+              <a:lnSpc>
+                <a:spcPct val="105000"/>
+              </a:lnSpc>
+              <a:spcAft>
+                <a:spcPts val="900"/>
+              </a:spcAft>
+            </a:pPr>
+            <a:r>
+              <a:rPr sz="1350" dirty="0">
+                <a:solidFill>
+                  <a:srgbClr val="FFFFFF"/>
+                </a:solidFill>
+                <a:latin typeface="Arial"/>
+              </a:rPr>
+              <a:t>•  Same model</a:t>
+            </a:r>
+            <a:r>
+              <a:rPr lang="en-US" sz="1350" dirty="0">
+                <a:solidFill>
+                  <a:srgbClr val="FFFFFF"/>
+                </a:solidFill>
+                <a:latin typeface="Arial"/>
+              </a:rPr>
+              <a:t>, same</a:t>
+            </a:r>
+            <a:r>
+              <a:rPr sz="1350" dirty="0">
+                <a:solidFill>
+                  <a:srgbClr val="FFFFFF"/>
+                </a:solidFill>
+                <a:latin typeface="Arial"/>
+              </a:rPr>
+              <a:t> </a:t>
+            </a:r>
+            <a:r>
+              <a:rPr lang="en-US" sz="1350" dirty="0">
+                <a:solidFill>
+                  <a:srgbClr val="FFFFFF"/>
+                </a:solidFill>
+                <a:latin typeface="Arial"/>
+              </a:rPr>
+              <a:t>LLM agent </a:t>
+            </a:r>
+            <a:r>
+              <a:rPr sz="1350" dirty="0">
+                <a:solidFill>
+                  <a:srgbClr val="FFFFFF"/>
+                </a:solidFill>
+                <a:latin typeface="Arial"/>
+              </a:rPr>
+              <a:t>chain</a:t>
+            </a:r>
+            <a:r>
+              <a:rPr lang="en-US" sz="1350" dirty="0">
+                <a:solidFill>
+                  <a:srgbClr val="FFFFFF"/>
+                </a:solidFill>
+                <a:latin typeface="Arial"/>
+              </a:rPr>
+              <a:t>, but </a:t>
+            </a:r>
+            <a:r>
+              <a:rPr sz="1350" dirty="0">
+                <a:solidFill>
+                  <a:srgbClr val="FFFFFF"/>
+                </a:solidFill>
+                <a:latin typeface="Arial"/>
+              </a:rPr>
+              <a:t>swap the system-prompt</a:t>
+            </a:r>
+            <a:r>
+              <a:rPr lang="en-US" sz="1350" dirty="0">
+                <a:solidFill>
+                  <a:srgbClr val="FFFFFF"/>
+                </a:solidFill>
+                <a:latin typeface="Arial"/>
+              </a:rPr>
+              <a:t>s</a:t>
+            </a:r>
+            <a:r>
+              <a:rPr sz="1350" dirty="0">
+                <a:solidFill>
+                  <a:srgbClr val="FFFFFF"/>
+                </a:solidFill>
+                <a:latin typeface="Arial"/>
+              </a:rPr>
+              <a:t> and measure</a:t>
+            </a:r>
+            <a:r>
+              <a:rPr lang="en-US" sz="1350" dirty="0">
+                <a:solidFill>
+                  <a:srgbClr val="FFFFFF"/>
+                </a:solidFill>
+                <a:latin typeface="Arial"/>
+              </a:rPr>
+              <a:t> if the spec/tests are met</a:t>
+            </a:r>
+            <a:r>
+              <a:rPr sz="1350" dirty="0">
+                <a:solidFill>
+                  <a:srgbClr val="FFFFFF"/>
+                </a:solidFill>
+                <a:latin typeface="Arial"/>
+              </a:rPr>
+              <a:t>.</a:t>
+            </a:r>
+          </a:p>
+          <a:p>
+            <a:pPr>
+              <a:lnSpc>
+                <a:spcPct val="105000"/>
+              </a:lnSpc>
+              <a:spcAft>
+                <a:spcPts val="900"/>
+              </a:spcAft>
+            </a:pPr>
+            <a:r>
+              <a:rPr sz="1350" dirty="0">
+                <a:solidFill>
+                  <a:srgbClr val="FFFFFF"/>
+                </a:solidFill>
+                <a:latin typeface="Arial"/>
+              </a:rPr>
+              <a:t>•  The QC checklist is a fixed regression suite across prompt versions.</a:t>
+            </a:r>
+          </a:p>
+        </p:txBody>
+      </p:sp>
+      <p:sp>
+        <p:nvSpPr>
+          <p:cNvPr id="5" name="Rectangle 4"/>
+          <p:cNvSpPr/>
+          <p:nvPr/>
+        </p:nvSpPr>
+        <p:spPr>
+          <a:xfrm>
+            <a:off x="377190" y="4149090"/>
+            <a:ext cx="3840480" cy="617220"/>
+          </a:xfrm>
+          <a:prstGeom prst="rect">
+            <a:avLst/>
+          </a:prstGeom>
+          <a:solidFill>
+            <a:srgbClr val="0099FF"/>
+          </a:solidFill>
+          <a:ln>
+            <a:noFill/>
+          </a:ln>
+          <a:effectLst/>
+        </p:spPr>
+        <p:style>
+          <a:lnRef idx="1">
+            <a:schemeClr val="accent1"/>
+          </a:lnRef>
+          <a:fillRef idx="3">
+            <a:schemeClr val="accent1"/>
+          </a:fillRef>
+          <a:effectRef idx="2">
+            <a:schemeClr val="accent1"/>
+          </a:effectRef>
+          <a:fontRef idx="minor">
+            <a:schemeClr val="lt1"/>
+          </a:fontRef>
+        </p:style>
+        <p:txBody>
+          <a:bodyPr wrap="square" lIns="102870" tIns="54864" rIns="102870" bIns="54864" rtlCol="0" anchor="ctr"/>
+          <a:lstStyle/>
+          <a:p>
+            <a:pPr algn="ctr"/>
+            <a:r>
+              <a:rPr sz="1500" b="1">
+                <a:solidFill>
+                  <a:srgbClr val="FFFFFF"/>
+                </a:solidFill>
+                <a:latin typeface="Arial"/>
+              </a:rPr>
+              <a:t>Prompts are code. Code needs tests.</a:t>
+            </a:r>
+          </a:p>
+        </p:txBody>
+      </p:sp>
+      <p:pic>
+        <p:nvPicPr>
+          <p:cNvPr id="6" name="Picture 5">
+            <a:extLst>
+              <a:ext uri="{FF2B5EF4-FFF2-40B4-BE49-F238E27FC236}">
+                <a16:creationId xmlns:a16="http://schemas.microsoft.com/office/drawing/2014/main" id="{78B5718E-6881-9FF6-F621-F5DF75C9E4D2}"/>
+              </a:ext>
+            </a:extLst>
+          </p:cNvPr>
+          <p:cNvPicPr>
+            <a:picLocks noChangeAspect="1"/>
+          </p:cNvPicPr>
+          <p:nvPr/>
+        </p:nvPicPr>
+        <p:blipFill>
+          <a:blip r:embed="rId2"/>
+          <a:srcRect r="6350"/>
+          <a:stretch>
+            <a:fillRect/>
+          </a:stretch>
+        </p:blipFill>
+        <p:spPr>
+          <a:xfrm>
+            <a:off x="4327072" y="0"/>
+            <a:ext cx="4816928" cy="5143500"/>
+          </a:xfrm>
+          <a:prstGeom prst="rect">
+            <a:avLst/>
+          </a:prstGeom>
+        </p:spPr>
+      </p:pic>
+    </p:spTree>
+  </p:cSld>
+  <p:clrMapOvr>
+    <a:masterClrMapping/>
+  </p:clrMapOvr>
+</p:sld>
+</file>
+
+<file path=ppt/slides/slide8.xml><?xml version="1.0" encoding="utf-8"?>
+<p:sld xmlns:a="http://schemas.openxmlformats.org/drawingml/2006/main" xmlns:r="http://schemas.openxmlformats.org/officeDocument/2006/relationships" xmlns:p="http://schemas.openxmlformats.org/presentationml/2006/main">
+  <p:cSld>
+    <p:spTree>
+      <p:nvGrpSpPr>
+        <p:cNvPr id="1" name=""/>
+        <p:cNvGrpSpPr/>
+        <p:nvPr/>
+      </p:nvGrpSpPr>
+      <p:grpSpPr>
+        <a:xfrm>
+          <a:off x="0" y="0"/>
+          <a:ext cx="0" cy="0"/>
+          <a:chOff x="0" y="0"/>
+          <a:chExt cx="0" cy="0"/>
+        </a:xfrm>
+      </p:grpSpPr>
+      <p:sp>
+        <p:nvSpPr>
+          <p:cNvPr id="2" name="Title 1">
+            <a:extLst>
+              <a:ext uri="{FF2B5EF4-FFF2-40B4-BE49-F238E27FC236}">
+                <a16:creationId xmlns:a16="http://schemas.microsoft.com/office/drawing/2014/main" id="{DA7EFD37-E273-A5B5-9809-025F7B7AEA6B}"/>
+              </a:ext>
+            </a:extLst>
+          </p:cNvPr>
+          <p:cNvSpPr>
+            <a:spLocks noGrp="1"/>
+          </p:cNvSpPr>
+          <p:nvPr>
+            <p:ph type="title"/>
+          </p:nvPr>
+        </p:nvSpPr>
+        <p:spPr>
+          <a:xfrm>
+            <a:off x="225824" y="137160"/>
+            <a:ext cx="8770130" cy="594000"/>
+          </a:xfrm>
+        </p:spPr>
+        <p:txBody>
+          <a:bodyPr>
+            <a:noAutofit/>
+          </a:bodyPr>
+          <a:lstStyle/>
+          <a:p>
+            <a:r>
+              <a:rPr lang="en-US" sz="2000" dirty="0"/>
+              <a:t>Chaining Workflows–E script </a:t>
+            </a:r>
+            <a:r>
+              <a:rPr lang="en-US" dirty="0"/>
+              <a:t>or more complex on YouTube</a:t>
+            </a:r>
+            <a:r>
+              <a:rPr lang="en-US" sz="2000" dirty="0"/>
+              <a:t> </a:t>
+            </a:r>
+            <a:r>
+              <a:rPr lang="en-US" sz="2000" dirty="0">
+                <a:hlinkClick r:id="rId2"/>
+              </a:rPr>
+              <a:t>video</a:t>
+            </a:r>
+            <a:endParaRPr lang="en-US" sz="2000" dirty="0"/>
+          </a:p>
+        </p:txBody>
+      </p:sp>
+      <p:pic>
+        <p:nvPicPr>
+          <p:cNvPr id="4" name="Picture 3">
+            <a:extLst>
+              <a:ext uri="{FF2B5EF4-FFF2-40B4-BE49-F238E27FC236}">
+                <a16:creationId xmlns:a16="http://schemas.microsoft.com/office/drawing/2014/main" id="{3AF43E44-3FB2-4DA0-F8D5-F9310D78E8F7}"/>
+              </a:ext>
+            </a:extLst>
+          </p:cNvPr>
+          <p:cNvPicPr>
+            <a:picLocks noChangeAspect="1"/>
+          </p:cNvPicPr>
+          <p:nvPr/>
+        </p:nvPicPr>
+        <p:blipFill>
+          <a:blip r:embed="rId3"/>
+          <a:stretch>
+            <a:fillRect/>
+          </a:stretch>
+        </p:blipFill>
+        <p:spPr>
+          <a:xfrm>
+            <a:off x="3953201" y="653284"/>
+            <a:ext cx="5042753" cy="817053"/>
+          </a:xfrm>
+          <a:prstGeom prst="rect">
+            <a:avLst/>
+          </a:prstGeom>
+        </p:spPr>
+      </p:pic>
+      <p:pic>
+        <p:nvPicPr>
+          <p:cNvPr id="6" name="Picture 5">
+            <a:extLst>
+              <a:ext uri="{FF2B5EF4-FFF2-40B4-BE49-F238E27FC236}">
+                <a16:creationId xmlns:a16="http://schemas.microsoft.com/office/drawing/2014/main" id="{C1F9F835-906E-04C0-3381-85969F99D08A}"/>
+              </a:ext>
+            </a:extLst>
+          </p:cNvPr>
+          <p:cNvPicPr>
+            <a:picLocks noChangeAspect="1"/>
+          </p:cNvPicPr>
+          <p:nvPr/>
+        </p:nvPicPr>
+        <p:blipFill>
+          <a:blip r:embed="rId4"/>
+          <a:stretch>
+            <a:fillRect/>
+          </a:stretch>
+        </p:blipFill>
+        <p:spPr>
+          <a:xfrm>
+            <a:off x="225824" y="786973"/>
+            <a:ext cx="2779330" cy="3940147"/>
+          </a:xfrm>
+          <a:prstGeom prst="rect">
+            <a:avLst/>
+          </a:prstGeom>
+        </p:spPr>
+      </p:pic>
+      <p:pic>
+        <p:nvPicPr>
+          <p:cNvPr id="7" name="Picture 6">
+            <a:extLst>
+              <a:ext uri="{FF2B5EF4-FFF2-40B4-BE49-F238E27FC236}">
+                <a16:creationId xmlns:a16="http://schemas.microsoft.com/office/drawing/2014/main" id="{4787644F-C451-5559-BC80-8D80C65B67AD}"/>
+              </a:ext>
+            </a:extLst>
+          </p:cNvPr>
+          <p:cNvPicPr>
+            <a:picLocks noChangeAspect="1"/>
+          </p:cNvPicPr>
+          <p:nvPr/>
+        </p:nvPicPr>
+        <p:blipFill>
+          <a:blip r:embed="rId5"/>
+          <a:stretch>
+            <a:fillRect/>
+          </a:stretch>
+        </p:blipFill>
+        <p:spPr>
+          <a:xfrm>
+            <a:off x="3445330" y="3218761"/>
+            <a:ext cx="3306536" cy="1060338"/>
+          </a:xfrm>
+          <a:prstGeom prst="rect">
+            <a:avLst/>
+          </a:prstGeom>
+        </p:spPr>
+      </p:pic>
+      <p:pic>
+        <p:nvPicPr>
+          <p:cNvPr id="8" name="Picture 7">
+            <a:extLst>
+              <a:ext uri="{FF2B5EF4-FFF2-40B4-BE49-F238E27FC236}">
+                <a16:creationId xmlns:a16="http://schemas.microsoft.com/office/drawing/2014/main" id="{B2910510-8E67-D063-1575-366FD1F86350}"/>
+              </a:ext>
+            </a:extLst>
+          </p:cNvPr>
+          <p:cNvPicPr>
+            <a:picLocks noChangeAspect="1"/>
+          </p:cNvPicPr>
+          <p:nvPr/>
+        </p:nvPicPr>
+        <p:blipFill>
+          <a:blip r:embed="rId6"/>
+          <a:stretch>
+            <a:fillRect/>
+          </a:stretch>
+        </p:blipFill>
+        <p:spPr>
+          <a:xfrm>
+            <a:off x="4979126" y="2466079"/>
+            <a:ext cx="4016828" cy="679199"/>
+          </a:xfrm>
+          <a:prstGeom prst="rect">
+            <a:avLst/>
+          </a:prstGeom>
+        </p:spPr>
+      </p:pic>
+      <p:pic>
+        <p:nvPicPr>
+          <p:cNvPr id="9" name="Picture 8">
+            <a:extLst>
+              <a:ext uri="{FF2B5EF4-FFF2-40B4-BE49-F238E27FC236}">
+                <a16:creationId xmlns:a16="http://schemas.microsoft.com/office/drawing/2014/main" id="{DA6C3967-C60C-F5C3-4286-1E8F67275F0D}"/>
+              </a:ext>
+            </a:extLst>
+          </p:cNvPr>
+          <p:cNvPicPr>
+            <a:picLocks noChangeAspect="1"/>
+          </p:cNvPicPr>
+          <p:nvPr/>
+        </p:nvPicPr>
+        <p:blipFill>
+          <a:blip r:embed="rId7"/>
+          <a:stretch>
+            <a:fillRect/>
+          </a:stretch>
+        </p:blipFill>
+        <p:spPr>
+          <a:xfrm>
+            <a:off x="6906372" y="3329540"/>
+            <a:ext cx="2089582" cy="949559"/>
+          </a:xfrm>
+          <a:prstGeom prst="rect">
+            <a:avLst/>
+          </a:prstGeom>
+        </p:spPr>
+      </p:pic>
+      <p:pic>
+        <p:nvPicPr>
+          <p:cNvPr id="10" name="Picture 9">
+            <a:extLst>
+              <a:ext uri="{FF2B5EF4-FFF2-40B4-BE49-F238E27FC236}">
+                <a16:creationId xmlns:a16="http://schemas.microsoft.com/office/drawing/2014/main" id="{DF03A46B-6184-A4C7-7958-895718EC9DF1}"/>
+              </a:ext>
+            </a:extLst>
+          </p:cNvPr>
+          <p:cNvPicPr>
+            <a:picLocks noChangeAspect="1"/>
+          </p:cNvPicPr>
+          <p:nvPr/>
+        </p:nvPicPr>
+        <p:blipFill>
+          <a:blip r:embed="rId8"/>
+          <a:stretch>
+            <a:fillRect/>
+          </a:stretch>
+        </p:blipFill>
+        <p:spPr>
+          <a:xfrm>
+            <a:off x="4260668" y="4431687"/>
+            <a:ext cx="4735286" cy="646862"/>
+          </a:xfrm>
+          <a:prstGeom prst="rect">
+            <a:avLst/>
+          </a:prstGeom>
+        </p:spPr>
+      </p:pic>
+      <p:pic>
+        <p:nvPicPr>
+          <p:cNvPr id="11" name="Picture 10">
+            <a:extLst>
+              <a:ext uri="{FF2B5EF4-FFF2-40B4-BE49-F238E27FC236}">
+                <a16:creationId xmlns:a16="http://schemas.microsoft.com/office/drawing/2014/main" id="{B8B35CA8-C6AC-229C-8804-BD216AB94240}"/>
+              </a:ext>
+            </a:extLst>
+          </p:cNvPr>
+          <p:cNvPicPr>
+            <a:picLocks noChangeAspect="1"/>
+          </p:cNvPicPr>
+          <p:nvPr/>
+        </p:nvPicPr>
+        <p:blipFill>
+          <a:blip r:embed="rId9"/>
+          <a:stretch>
+            <a:fillRect/>
+          </a:stretch>
+        </p:blipFill>
+        <p:spPr>
+          <a:xfrm>
+            <a:off x="4195354" y="1562468"/>
+            <a:ext cx="4800600" cy="776108"/>
+          </a:xfrm>
+          <a:prstGeom prst="rect">
+            <a:avLst/>
+          </a:prstGeom>
+        </p:spPr>
+      </p:pic>
+      <p:sp>
+        <p:nvSpPr>
+          <p:cNvPr id="3" name="TextBox 2">
+            <a:extLst>
+              <a:ext uri="{FF2B5EF4-FFF2-40B4-BE49-F238E27FC236}">
+                <a16:creationId xmlns:a16="http://schemas.microsoft.com/office/drawing/2014/main" id="{4355D022-FF07-9247-F80C-047195B86A7B}"/>
               </a:ext>
             </a:extLst>
           </p:cNvPr>
@@ -2003,8 +3698,8 @@
         </p:nvSpPr>
         <p:spPr>
           <a:xfrm>
-            <a:off x="164757" y="4744730"/>
-            <a:ext cx="6487297" cy="523220"/>
+            <a:off x="155121" y="4787896"/>
+            <a:ext cx="5184321" cy="261610"/>
           </a:xfrm>
           <a:prstGeom prst="rect">
             <a:avLst/>
@@ -2036,22 +3731,19 @@
           <a:lstStyle/>
           <a:p>
             <a:r>
-              <a:rPr lang="en-US" dirty="0">
-                <a:hlinkClick r:id="rId3"/>
+              <a:rPr lang="en-US" sz="1100" dirty="0">
+                <a:hlinkClick r:id="rId10"/>
               </a:rPr>
-              <a:t>https://www.youtube.com/watch?v=sal78ACtGTc&amp;ab_channel=SequoiaCapital</a:t>
-            </a:r>
-            <a:endParaRPr lang="en-US" dirty="0"/>
-          </a:p>
-          <a:p>
-            <a:endParaRPr lang="en-US" dirty="0"/>
+              <a:t>https://www.youtube.com/watch?v=QV6kaNFyoyQ&amp;t=74s</a:t>
+            </a:r>
+            <a:endParaRPr lang="en-US" sz="1100" dirty="0"/>
           </a:p>
         </p:txBody>
       </p:sp>
     </p:spTree>
     <p:extLst>
       <p:ext uri="{BB962C8B-B14F-4D97-AF65-F5344CB8AC3E}">
-        <p14:creationId xmlns:p14="http://schemas.microsoft.com/office/powerpoint/2010/main" val="2436412405"/>
+        <p14:creationId xmlns:p14="http://schemas.microsoft.com/office/powerpoint/2010/main" val="1109680208"/>
       </p:ext>
     </p:extLst>
   </p:cSld>
@@ -2062,7 +3754,7 @@
 </p:sld>
 </file>
 
-<file path=ppt/slides/slide4.xml><?xml version="1.0" encoding="utf-8"?>
+<file path=ppt/slides/slide9.xml><?xml version="1.0" encoding="utf-8"?>
 <p:sld xmlns:a="http://schemas.openxmlformats.org/drawingml/2006/main" xmlns:r="http://schemas.openxmlformats.org/officeDocument/2006/relationships" xmlns:p="http://schemas.openxmlformats.org/presentationml/2006/main">
   <p:cSld>
     <p:spTree>
@@ -2121,10 +3813,10 @@
       </p:sp>
       <p:pic>
         <p:nvPicPr>
-          <p:cNvPr id="4" name="Picture 3">
+          <p:cNvPr id="3" name="Picture 2">
             <a:extLst>
               <a:ext uri="{FF2B5EF4-FFF2-40B4-BE49-F238E27FC236}">
-                <a16:creationId xmlns:a16="http://schemas.microsoft.com/office/drawing/2014/main" id="{E2A0C11C-8FD9-05D3-6C3A-8C50150EAA94}"/>
+                <a16:creationId xmlns:a16="http://schemas.microsoft.com/office/drawing/2014/main" id="{4F6AC787-1DD1-316B-7613-C8E59A1FE178}"/>
               </a:ext>
             </a:extLst>
           </p:cNvPr>
@@ -2134,13 +3826,7 @@
           <p:nvPr/>
         </p:nvPicPr>
         <p:blipFill>
-          <a:blip r:embed="rId2" cstate="screen">
-            <a:extLst>
-              <a:ext uri="{28A0092B-C50C-407E-A947-70E740481C1C}">
-                <a14:useLocalDpi xmlns:a14="http://schemas.microsoft.com/office/drawing/2010/main"/>
-              </a:ext>
-            </a:extLst>
-          </a:blip>
+          <a:blip r:embed="rId2"/>
           <a:stretch>
             <a:fillRect/>
           </a:stretch>
@@ -2159,220 +3845,6 @@
     <p:extLst>
       <p:ext uri="{BB962C8B-B14F-4D97-AF65-F5344CB8AC3E}">
         <p14:creationId xmlns:p14="http://schemas.microsoft.com/office/powerpoint/2010/main" val="472498055"/>
-      </p:ext>
-    </p:extLst>
-  </p:cSld>
-  <p:clrMapOvr>
-    <a:masterClrMapping/>
-  </p:clrMapOvr>
-  <p:transition spd="med"/>
-</p:sld>
-</file>
-
-<file path=ppt/slides/slide5.xml><?xml version="1.0" encoding="utf-8"?>
-<p:sld xmlns:a="http://schemas.openxmlformats.org/drawingml/2006/main" xmlns:r="http://schemas.openxmlformats.org/officeDocument/2006/relationships" xmlns:p="http://schemas.openxmlformats.org/presentationml/2006/main">
-  <p:cSld>
-    <p:spTree>
-      <p:nvGrpSpPr>
-        <p:cNvPr id="1" name=""/>
-        <p:cNvGrpSpPr/>
-        <p:nvPr/>
-      </p:nvGrpSpPr>
-      <p:grpSpPr>
-        <a:xfrm>
-          <a:off x="0" y="0"/>
-          <a:ext cx="0" cy="0"/>
-          <a:chOff x="0" y="0"/>
-          <a:chExt cx="0" cy="0"/>
-        </a:xfrm>
-      </p:grpSpPr>
-      <p:sp>
-        <p:nvSpPr>
-          <p:cNvPr id="2" name="Title 1">
-            <a:extLst>
-              <a:ext uri="{FF2B5EF4-FFF2-40B4-BE49-F238E27FC236}">
-                <a16:creationId xmlns:a16="http://schemas.microsoft.com/office/drawing/2014/main" id="{9D80F232-06F6-6582-38D5-590E6E4978E2}"/>
-              </a:ext>
-            </a:extLst>
-          </p:cNvPr>
-          <p:cNvSpPr>
-            <a:spLocks noGrp="1"/>
-          </p:cNvSpPr>
-          <p:nvPr>
-            <p:ph type="title"/>
-          </p:nvPr>
-        </p:nvSpPr>
-        <p:spPr>
-          <a:xfrm>
-            <a:off x="225824" y="137160"/>
-            <a:ext cx="8918176" cy="594000"/>
-          </a:xfrm>
-        </p:spPr>
-        <p:txBody>
-          <a:bodyPr>
-            <a:noAutofit/>
-          </a:bodyPr>
-          <a:lstStyle/>
-          <a:p>
-            <a:r>
-              <a:rPr lang="en-US" sz="2000" dirty="0"/>
-              <a:t>Primer on Agentic Systems – see bad quality in repo or YouTube  </a:t>
-            </a:r>
-            <a:r>
-              <a:rPr lang="en-US" sz="2000" dirty="0">
-                <a:hlinkClick r:id="rId2"/>
-              </a:rPr>
-              <a:t>video</a:t>
-            </a:r>
-            <a:endParaRPr lang="en-US" sz="2000" dirty="0"/>
-          </a:p>
-        </p:txBody>
-      </p:sp>
-      <p:pic>
-        <p:nvPicPr>
-          <p:cNvPr id="6" name="Picture 5">
-            <a:extLst>
-              <a:ext uri="{FF2B5EF4-FFF2-40B4-BE49-F238E27FC236}">
-                <a16:creationId xmlns:a16="http://schemas.microsoft.com/office/drawing/2014/main" id="{1C6CB962-D11C-E0C9-0C23-8A17BB6CB19B}"/>
-              </a:ext>
-            </a:extLst>
-          </p:cNvPr>
-          <p:cNvPicPr>
-            <a:picLocks noChangeAspect="1"/>
-          </p:cNvPicPr>
-          <p:nvPr/>
-        </p:nvPicPr>
-        <p:blipFill>
-          <a:blip r:embed="rId3"/>
-          <a:stretch>
-            <a:fillRect/>
-          </a:stretch>
-        </p:blipFill>
-        <p:spPr>
-          <a:xfrm>
-            <a:off x="762000" y="731160"/>
-            <a:ext cx="7620000" cy="4203700"/>
-          </a:xfrm>
-          <a:prstGeom prst="rect">
-            <a:avLst/>
-          </a:prstGeom>
-        </p:spPr>
-      </p:pic>
-    </p:spTree>
-    <p:extLst>
-      <p:ext uri="{BB962C8B-B14F-4D97-AF65-F5344CB8AC3E}">
-        <p14:creationId xmlns:p14="http://schemas.microsoft.com/office/powerpoint/2010/main" val="502592210"/>
-      </p:ext>
-    </p:extLst>
-  </p:cSld>
-  <p:clrMapOvr>
-    <a:masterClrMapping/>
-  </p:clrMapOvr>
-  <p:transition spd="med"/>
-</p:sld>
-</file>
-
-<file path=ppt/slides/slide6.xml><?xml version="1.0" encoding="utf-8"?>
-<p:sld xmlns:a="http://schemas.openxmlformats.org/drawingml/2006/main" xmlns:r="http://schemas.openxmlformats.org/officeDocument/2006/relationships" xmlns:p="http://schemas.openxmlformats.org/presentationml/2006/main">
-  <p:cSld>
-    <p:spTree>
-      <p:nvGrpSpPr>
-        <p:cNvPr id="1" name=""/>
-        <p:cNvGrpSpPr/>
-        <p:nvPr/>
-      </p:nvGrpSpPr>
-      <p:grpSpPr>
-        <a:xfrm>
-          <a:off x="0" y="0"/>
-          <a:ext cx="0" cy="0"/>
-          <a:chOff x="0" y="0"/>
-          <a:chExt cx="0" cy="0"/>
-        </a:xfrm>
-      </p:grpSpPr>
-      <p:sp>
-        <p:nvSpPr>
-          <p:cNvPr id="2" name="Title 1">
-            <a:extLst>
-              <a:ext uri="{FF2B5EF4-FFF2-40B4-BE49-F238E27FC236}">
-                <a16:creationId xmlns:a16="http://schemas.microsoft.com/office/drawing/2014/main" id="{DA7EFD37-E273-A5B5-9809-025F7B7AEA6B}"/>
-              </a:ext>
-            </a:extLst>
-          </p:cNvPr>
-          <p:cNvSpPr>
-            <a:spLocks noGrp="1"/>
-          </p:cNvSpPr>
-          <p:nvPr>
-            <p:ph type="title"/>
-          </p:nvPr>
-        </p:nvSpPr>
-        <p:spPr>
-          <a:xfrm>
-            <a:off x="225824" y="137160"/>
-            <a:ext cx="8770130" cy="594000"/>
-          </a:xfrm>
-        </p:spPr>
-        <p:txBody>
-          <a:bodyPr>
-            <a:normAutofit fontScale="90000"/>
-          </a:bodyPr>
-          <a:lstStyle/>
-          <a:p>
-            <a:r>
-              <a:rPr lang="en-US" dirty="0"/>
-              <a:t>Chaining Workflows–</a:t>
-            </a:r>
-            <a:r>
-              <a:rPr lang="en-US" sz="2800" dirty="0"/>
-              <a:t> see bad quality in repo or YouTube</a:t>
-            </a:r>
-            <a:r>
-              <a:rPr lang="en-US" sz="2700" dirty="0"/>
-              <a:t> </a:t>
-            </a:r>
-            <a:r>
-              <a:rPr lang="en-US" sz="2700" dirty="0">
-                <a:hlinkClick r:id="rId2"/>
-              </a:rPr>
-              <a:t>video</a:t>
-            </a:r>
-            <a:endParaRPr lang="en-US" dirty="0"/>
-          </a:p>
-        </p:txBody>
-      </p:sp>
-      <p:pic>
-        <p:nvPicPr>
-          <p:cNvPr id="5" name="Picture 4">
-            <a:extLst>
-              <a:ext uri="{FF2B5EF4-FFF2-40B4-BE49-F238E27FC236}">
-                <a16:creationId xmlns:a16="http://schemas.microsoft.com/office/drawing/2014/main" id="{29EA77B9-4556-CBB7-6A15-95B34226AB6F}"/>
-              </a:ext>
-            </a:extLst>
-          </p:cNvPr>
-          <p:cNvPicPr>
-            <a:picLocks noChangeAspect="1"/>
-          </p:cNvPicPr>
-          <p:nvPr/>
-        </p:nvPicPr>
-        <p:blipFill>
-          <a:blip r:embed="rId3"/>
-          <a:stretch>
-            <a:fillRect/>
-          </a:stretch>
-        </p:blipFill>
-        <p:spPr>
-          <a:xfrm>
-            <a:off x="1015882" y="990055"/>
-            <a:ext cx="6961414" cy="3767776"/>
-          </a:xfrm>
-          <a:prstGeom prst="rect">
-            <a:avLst/>
-          </a:prstGeom>
-        </p:spPr>
-      </p:pic>
-    </p:spTree>
-    <p:extLst>
-      <p:ext uri="{BB962C8B-B14F-4D97-AF65-F5344CB8AC3E}">
-        <p14:creationId xmlns:p14="http://schemas.microsoft.com/office/powerpoint/2010/main" val="1109680208"/>
       </p:ext>
     </p:extLst>
   </p:cSld>
